--- a/referidos/salidas/Sesion-Gratis-30min-ES.pptx
+++ b/referidos/salidas/Sesion-Gratis-30min-ES.pptx
@@ -117,27 +117,27 @@
   <p:extLst>
     <p:ext uri="{521415D9-36F7-43E2-AB2F-B90AF26B5E84}">
       <p14:sectionLst xmlns:p14="http://schemas.microsoft.com/office/powerpoint/2010/main">
-        <p14:section name="Apertura" id="{e8360e68-0d2e-9c46-3b58-3c6d8bd428fa}">
+        <p14:section name="Apertura" id="{766eb414-cad2-e2b3-9277-2c0495d6046a}">
           <p14:sldIdLst>
             <p14:sldId id="256"/>
             <p14:sldId id="257"/>
             <p14:sldId id="258"/>
           </p14:sldIdLst>
         </p14:section>
-        <p14:section name="Perfil" id="{26b36948-a32e-3767-3067-17db31535dfc}">
+        <p14:section name="Perfil" id="{fc025808-fcc7-2da6-f00b-7fc0d0d9544f}">
           <p14:sldIdLst>
             <p14:sldId id="259"/>
             <p14:sldId id="260"/>
             <p14:sldId id="261"/>
           </p14:sldIdLst>
         </p14:section>
-        <p14:section name="Precio y clase de prueba" id="{f74ec7d8-b9d8-a0cf-8448-f07fbd6a070c}">
+        <p14:section name="Precio y clase de prueba" id="{2ff5ac9f-ac88-8272-d085-d01636a60946}">
           <p14:sldIdLst>
             <p14:sldId id="262"/>
             <p14:sldId id="263"/>
           </p14:sldIdLst>
         </p14:section>
-        <p14:section name="Cierre" id="{3ed7aba3-cceb-12cf-37e7-403601fb653d}">
+        <p14:section name="Cierre" id="{5a42a2be-5595-42a2-8388-0eeb73f83b5e}">
           <p14:sldIdLst>
             <p14:sldId id="264"/>
             <p14:sldId id="265"/>
